--- a/carpentry/intake-142/PowerPoint/Day-21_2026-12-03_Week-6.pptx
+++ b/carpentry/intake-142/PowerPoint/Day-21_2026-12-03_Week-6.pptx
@@ -887,7 +887,7 @@
           <a:p/>
           <a:p>
             <a:r>
-              <a:t>Imagine that we have assembled a rectangular frame. Its side lengths can be correct while its corners are still out of square. Today we need evidence about both the lengths and the angles. We will use the textbook, pages 194–196, and the drawing questions in 12A and 12B. What extra measurement crosses the frame and helps us check its shape? A diagonal. By the end, you should be able to state the target diagonal and explain which way the frame needs to move.</a:t>
+              <a:t>Imagine that we have assembled a rectangular frame. Its side lengths can be correct while its corners are still out of square. Today we need evidence about both the lengths and the angles. We will use the textbook, pages 304–306, and the drawing questions in 12A and 12B. What extra measurement crosses the frame and helps us check its shape? A diagonal. By the end, you should be able to state the target diagonal and explain which way the frame needs to move.</a:t>
             </a:r>
           </a:p>
         </p:txBody>
@@ -1191,7 +1191,7 @@
           <a:p/>
           <a:p>
             <a:r>
-              <a:t>On page 195, follow the comparison in Example 12.7. Separate the intended triangle from the reading on the tape. The intended lengths establish the square target; the observed length tells us how the actual corner differs. A shorter cross measurement closes the included angle when the two leg lengths stay fixed. A longer cross measurement opens it. What must stay fixed for that comparison to make sense? The marked distances along the two sides. If a mark has moved, repeat the measurement before deciding that the corner itself is wrong.</a:t>
+              <a:t>On page 305, follow the comparison in Example 12.7. Separate the intended triangle from the reading on the tape. The intended lengths establish the square target; the observed length tells us how the actual corner differs. A shorter cross measurement closes the included angle when the two leg lengths stay fixed. A longer cross measurement opens it. What must stay fixed for that comparison to make sense? The marked distances along the two sides. If a mark has moved, repeat the measurement before deciding that the corner itself is wrong.</a:t>
             </a:r>
           </a:p>
         </p:txBody>
@@ -2279,7 +2279,7 @@
           <a:p/>
           <a:p>
             <a:r>
-              <a:t>A brace may give us an angle and a length while the height is unknown. Pythagoras alone needs two side lengths, so we need another relationship. Sine, cosine and tangent connect an angle with a pair of sides in a right triangle. Today the important first move is naming those sides from the marked angle. We will use pages 202–206 and 13A Q1–8, then the assigned 13C applications when ready. Check that your calculator is in degrees.</a:t>
+              <a:t>A brace may give us an angle and a length while the height is unknown. Pythagoras alone needs two side lengths, so we need another relationship. Sine, cosine and tangent connect an angle with a pair of sides in a right triangle. Today the important first move is naming those sides from the marked angle. We will use pages 326–330 and 13A Q1–8, then the assigned 13C applications when ready. Check that your calculator is in degrees.</a:t>
             </a:r>
           </a:p>
         </p:txBody>
@@ -2583,7 +2583,7 @@
           <a:p/>
           <a:p>
             <a:r>
-              <a:t>Use Figure 13.1 on page 202 to trace the side names from the marked angle. First locate the hypotenuse across from the right angle; then point across the triangle from the chosen angle to find opposite. Adjacent is the remaining leg beside that angle. Ask your partner to name the same sides using the other acute angle. What should they exchange? Opposite and adjacent. This small labelling step prevents a large calculation error: a calculator can evaluate the wrong trig ratio perfectly, so it cannot decide the correct labels for us.</a:t>
+              <a:t>Use Figure 13.1 on page 326 to trace the side names from the marked angle. First locate the hypotenuse across from the right angle; then point across the triangle from the chosen angle to find opposite. Adjacent is the remaining leg beside that angle. Ask your partner to name the same sides using the other acute angle. What should they exchange? Opposite and adjacent. This small labelling step prevents a large calculation error: a calculator can evaluate the wrong trig ratio perfectly, so it cannot decide the correct labels for us.</a:t>
             </a:r>
           </a:p>
         </p:txBody>
@@ -2659,7 +2659,7 @@
           <a:p/>
           <a:p>
             <a:r>
-              <a:t>In the brace example on page 205, the sloping brace is the hypotenuse and the vertical rise is opposite the angle measured from the horizontal. That is why the example uses sine. Follow the written equation from ratio to isolated height rather than starting with the key sequence. What must be true about the height compared with the sloping brace? It must be shorter. If your answer is longer, stop and inspect the ratio, the rearrangement and DEG mode. A drawing provides a useful reasonableness check before we trust the decimal.</a:t>
+              <a:t>In the brace example on page 329, the sloping brace is the hypotenuse and the vertical rise is opposite the angle measured from the horizontal. That is why the example uses sine. Follow the written equation from ratio to isolated height rather than starting with the key sequence. What must be true about the height compared with the sloping brace? It must be shorter. If your answer is longer, stop and inspect the ratio, the rearrangement and DEG mode. A drawing provides a useful reasonableness check before we trust the decimal.</a:t>
             </a:r>
           </a:p>
         </p:txBody>
@@ -3051,7 +3051,7 @@
           <a:p/>
           <a:p>
             <a:r>
-              <a:t>Continue with 13A Q6–8, and move to 13C Q1–2 when ready. Keep a labelled triangle beside each equation. In Numeracy Hub, use one Easy right-triangle task and compare its drawing with your paper method. Do not use a remembered sequence of buttons as a substitute for choosing the ratio. Before each answer, ask whether a leg should be shorter than the hypotenuse and whether the direction of the calculation matches the unknown in the drawing.</a:t>
+              <a:t>Continue with 13A Q6–8, and move to 13C Q1–2 when ready. Keep a labelled triangle beside each equation. In Numeracy Hub, use one Level 1 right-triangle task and compare its drawing with your paper method. Do not use a remembered sequence of buttons as a substitute for choosing the ratio. Before each answer, ask whether a leg should be shorter than the hypotenuse and whether the direction of the calculation matches the unknown in the drawing.</a:t>
             </a:r>
           </a:p>
         </p:txBody>
@@ -3127,7 +3127,7 @@
           <a:p/>
           <a:p>
             <a:r>
-              <a:t>Open Angles and Trig in Numeracy Hub, then Module 3 for right-triangle trigonometry. Select the scheduled Easy task and read its own values; the navigation image is not a new set of dimensions. Keep the answer hidden until your labelled sketch and equation are written. Which setting must match an angle carrying the degree symbol? DEG. When you check the result, compare the chosen ratio and the interpretation of the diagram as well as the final number.</a:t>
+              <a:t>Open Angles and Trig in Numeracy Hub, then Module 3 for right-triangle trigonometry. Select the scheduled Level 1 task and read its own values; the navigation image is not a new set of dimensions. Keep the answer hidden until your labelled sketch and equation are written. Which setting must match an angle carrying the degree symbol? DEG. When you check the result, compare the chosen ratio and the interpretation of the diagram as well as the final number.</a:t>
             </a:r>
           </a:p>
         </p:txBody>
@@ -3203,7 +3203,7 @@
           <a:p/>
           <a:p>
             <a:r>
-              <a:t>In Shape Canvas, label the reference angle and the opposite, adjacent and hypotenuse sides. Hide the side you are solving for, but retain the known side and angle from the task. Write your ratio on paper, rearrange, and calculate in degrees. Then compare with the Easy task in Numeracy Hub. What should match between the paper and tool diagrams? The reference angle and the identities of the known and unknown sides. The drawings do not have to sit in the same orientation to represent the same relationship.</a:t>
+              <a:t>In Shape Canvas, label the reference angle and the opposite, adjacent and hypotenuse sides. Hide the side you are solving for, but retain the known side and angle from the task. Write your ratio on paper, rearrange, and calculate in degrees. Then compare with the Level 1 task in Numeracy Hub. What should match between the paper and tool diagrams? The reference angle and the identities of the known and unknown sides. The drawings do not have to sit in the same orientation to represent the same relationship.</a:t>
             </a:r>
           </a:p>
         </p:txBody>
@@ -5291,7 +5291,7 @@
                 </a:solidFill>
                 <a:latin typeface="Arial"/>
               </a:rPr>
-              <a:t>Textbook sections 12.5–12.6 pp.194–196</a:t>
+              <a:t>Textbook sections 12.5–12.6 pp.304–306</a:t>
             </a:r>
           </a:p>
         </p:txBody>
@@ -6049,7 +6049,7 @@
                 </a:solidFill>
                 <a:latin typeface="Arial"/>
               </a:rPr>
-              <a:t>Textbook sections 12.5–12.6 pp.194–196</a:t>
+              <a:t>Textbook sections 12.5–12.6 pp.304–306</a:t>
             </a:r>
           </a:p>
         </p:txBody>
@@ -6249,7 +6249,7 @@
                 </a:solidFill>
                 <a:latin typeface="Arial"/>
               </a:rPr>
-              <a:t>Resources: Exercise Book 12A Q17–18 (p.76); 12B Q4–5,7 (pp.77–78)</a:t>
+              <a:t>Resources: Exercise Book 12A Q17–18 (p.115); 12B Q4–5,7 (pp.116–117)</a:t>
             </a:r>
           </a:p>
         </p:txBody>
@@ -6863,7 +6863,7 @@
                 </a:solidFill>
                 <a:latin typeface="Arial"/>
               </a:rPr>
-              <a:t>Textbook sections 12.5–12.6 pp.194–196</a:t>
+              <a:t>Textbook sections 12.5–12.6 pp.304–306</a:t>
             </a:r>
           </a:p>
         </p:txBody>
@@ -7063,7 +7063,7 @@
                 </a:solidFill>
                 <a:latin typeface="Arial"/>
               </a:rPr>
-              <a:t>Resources: Exercise Book 12A Q17–18 (p.76); 12B Q4–5,7 (pp.77–78)</a:t>
+              <a:t>Resources: Exercise Book 12A Q17–18 (p.115); 12B Q4–5,7 (pp.116–117)</a:t>
             </a:r>
           </a:p>
         </p:txBody>
@@ -7677,7 +7677,7 @@
                 </a:solidFill>
                 <a:latin typeface="Arial"/>
               </a:rPr>
-              <a:t>Textbook sections 12.5–12.6 pp.194–196</a:t>
+              <a:t>Textbook sections 12.5–12.6 pp.304–306</a:t>
             </a:r>
           </a:p>
         </p:txBody>
@@ -8453,7 +8453,7 @@
                 </a:solidFill>
                 <a:latin typeface="Arial"/>
               </a:rPr>
-              <a:t>Textbook sections 12.5–12.6 pp.194–196</a:t>
+              <a:t>Textbook sections 12.5–12.6 pp.304–306</a:t>
             </a:r>
           </a:p>
         </p:txBody>
@@ -9412,7 +9412,7 @@
                 </a:solidFill>
                 <a:latin typeface="Arial"/>
               </a:rPr>
-              <a:t>Textbook sections 12.5–12.6 pp.194–196</a:t>
+              <a:t>Textbook sections 12.5–12.6 pp.304–306</a:t>
             </a:r>
           </a:p>
         </p:txBody>
@@ -10123,7 +10123,7 @@
                 </a:solidFill>
                 <a:latin typeface="Arial"/>
               </a:rPr>
-              <a:t>Textbook sections 12.5–12.6 pp.194–196</a:t>
+              <a:t>Textbook sections 12.5–12.6 pp.304–306</a:t>
             </a:r>
           </a:p>
         </p:txBody>
@@ -10834,7 +10834,7 @@
                 </a:solidFill>
                 <a:latin typeface="Arial"/>
               </a:rPr>
-              <a:t>Textbook sections 12.5–12.6 pp.194–196</a:t>
+              <a:t>Textbook sections 12.5–12.6 pp.304–306</a:t>
             </a:r>
           </a:p>
         </p:txBody>
@@ -11034,7 +11034,7 @@
                 </a:solidFill>
                 <a:latin typeface="Arial"/>
               </a:rPr>
-              <a:t>Resources: Exercise Book 12A Q17–18 (p.76); 12B Q4–5,7 (pp.77–78)</a:t>
+              <a:t>Resources: Exercise Book 12A Q17–18 (p.115); 12B Q4–5,7 (pp.116–117)</a:t>
             </a:r>
           </a:p>
         </p:txBody>
@@ -11648,7 +11648,7 @@
                 </a:solidFill>
                 <a:latin typeface="Arial"/>
               </a:rPr>
-              <a:t>Textbook sections 12.5–12.6 pp.194–196</a:t>
+              <a:t>Textbook sections 12.5–12.6 pp.304–306</a:t>
             </a:r>
           </a:p>
         </p:txBody>
@@ -12359,7 +12359,7 @@
                 </a:solidFill>
                 <a:latin typeface="Arial"/>
               </a:rPr>
-              <a:t>Textbook sections 12.5–12.6 pp.194–196</a:t>
+              <a:t>Textbook sections 12.5–12.6 pp.304–306</a:t>
             </a:r>
           </a:p>
         </p:txBody>
@@ -16422,7 +16422,7 @@
                 </a:solidFill>
                 <a:latin typeface="Arial"/>
               </a:rPr>
-              <a:t>Textbook sections 12.5–12.6 pp.194–196</a:t>
+              <a:t>Textbook sections 12.5–12.6 pp.304–306</a:t>
             </a:r>
           </a:p>
         </p:txBody>
@@ -16622,7 +16622,7 @@
                 </a:solidFill>
                 <a:latin typeface="Arial"/>
               </a:rPr>
-              <a:t>Resources: Exercise Book 12A Q17–18 (p.76); 12B Q4–5,7 (pp.77–78)</a:t>
+              <a:t>Resources: Exercise Book 12A Q17–18 (p.115); 12B Q4–5,7 (pp.116–117)</a:t>
             </a:r>
           </a:p>
         </p:txBody>
@@ -17901,7 +17901,7 @@
                 </a:solidFill>
                 <a:latin typeface="Arial"/>
               </a:rPr>
-              <a:t>Textbook sections 13.1–13.3 pp.202–206; sections 2.10 pp.37–38</a:t>
+              <a:t>Textbook sections 13.1–13.3 pp.326–330; sections 2.10 pp.57–58</a:t>
             </a:r>
           </a:p>
         </p:txBody>
@@ -18101,7 +18101,7 @@
                 </a:solidFill>
                 <a:latin typeface="Arial"/>
               </a:rPr>
-              <a:t>Textbook sections 13.1–13.3 pp.202–206; sections 2.10 pp.37–38</a:t>
+              <a:t>Textbook sections 13.1–13.3 pp.326–330; sections 2.10 pp.57–58</a:t>
             </a:r>
           </a:p>
         </p:txBody>
@@ -18149,7 +18149,7 @@
                 </a:solidFill>
                 <a:latin typeface="Arial"/>
               </a:rPr>
-              <a:t>Exercise Book 13A Q1–8 (pp.81–82); 13C Q1–2 (p.85)</a:t>
+              <a:t>Exercise Book 13A Q1–8 (pp.127–128); 13C Q1–2 (p.131)</a:t>
             </a:r>
           </a:p>
         </p:txBody>
@@ -18811,7 +18811,7 @@
                 </a:solidFill>
                 <a:latin typeface="Arial"/>
               </a:rPr>
-              <a:t>Textbook sections 13.1–13.3 pp.202–206; sections 2.10 pp.37–38</a:t>
+              <a:t>Textbook sections 13.1–13.3 pp.326–330; sections 2.10 pp.57–58</a:t>
             </a:r>
           </a:p>
         </p:txBody>
@@ -19011,7 +19011,7 @@
                 </a:solidFill>
                 <a:latin typeface="Arial"/>
               </a:rPr>
-              <a:t>Resources: Exercise Book 13A Q1–8 (pp.81–82); 13C Q1–2 (p.85)</a:t>
+              <a:t>Resources: Exercise Book 13A Q1–8 (pp.127–128); 13C Q1–2 (p.131)</a:t>
             </a:r>
           </a:p>
         </p:txBody>
@@ -19760,7 +19760,7 @@
                 </a:solidFill>
                 <a:latin typeface="Arial"/>
               </a:rPr>
-              <a:t>Textbook sections 13.1–13.3 pp.202–206; sections 2.10 pp.37–38</a:t>
+              <a:t>Textbook sections 13.1–13.3 pp.326–330; sections 2.10 pp.57–58</a:t>
             </a:r>
           </a:p>
         </p:txBody>
@@ -21005,7 +21005,7 @@
                 </a:solidFill>
                 <a:latin typeface="Arial"/>
               </a:rPr>
-              <a:t>Textbook sections 13.1–13.3 pp.202–206; sections 2.10 pp.37–38</a:t>
+              <a:t>Textbook sections 13.1–13.3 pp.326–330; sections 2.10 pp.57–58</a:t>
             </a:r>
           </a:p>
         </p:txBody>
@@ -22354,7 +22354,7 @@
                 <a:ea typeface="Arial" pitchFamily="34" charset="-122"/>
                 <a:cs typeface="Arial" pitchFamily="34" charset="-120"/>
               </a:rPr>
-              <a:t>Exercise Book 13A pp.81–82 • Numeracy Hub → Angles and Trig → Module 3 • Shape Canvas right triangle</a:t>
+              <a:t>Exercise Book 13A pp.127–128 • Numeracy Hub → Angles and Trig → Module 3 • Shape Canvas right triangle</a:t>
             </a:r>
             <a:endParaRPr lang="en-US" sz="1050" dirty="0"/>
           </a:p>
@@ -22950,7 +22950,7 @@
                 </a:solidFill>
                 <a:latin typeface="Arial"/>
               </a:rPr>
-              <a:t>Textbook  |  page 202</a:t>
+              <a:t>Textbook  |  page 326</a:t>
             </a:r>
           </a:p>
         </p:txBody>
@@ -22998,7 +22998,7 @@
                 </a:solidFill>
                 <a:latin typeface="Arial"/>
               </a:rPr>
-              <a:t>Textbook sections 13.1–13.3 pp.202–206; sections 2.10 pp.37–38</a:t>
+              <a:t>Textbook sections 13.1–13.3 pp.326–330; sections 2.10 pp.57–58</a:t>
             </a:r>
           </a:p>
         </p:txBody>
@@ -23070,7 +23070,7 @@
                 </a:solidFill>
                 <a:latin typeface="Arial"/>
               </a:rPr>
-              <a:t>Textbook p.202 • Figure 13.1 — Opposite and adjacent depend on the marked angle</a:t>
+              <a:t>Textbook p.326 • Figure 13.1 — Opposite and adjacent depend on the marked angle</a:t>
             </a:r>
           </a:p>
         </p:txBody>
@@ -23636,7 +23636,7 @@
                 </a:solidFill>
                 <a:latin typeface="Arial"/>
               </a:rPr>
-              <a:t>Textbook  |  page 205</a:t>
+              <a:t>Textbook  |  page 329</a:t>
             </a:r>
           </a:p>
         </p:txBody>
@@ -23684,7 +23684,7 @@
                 </a:solidFill>
                 <a:latin typeface="Arial"/>
               </a:rPr>
-              <a:t>Textbook sections 13.1–13.3 pp.202–206; sections 2.10 pp.37–38</a:t>
+              <a:t>Textbook sections 13.1–13.3 pp.326–330; sections 2.10 pp.57–58</a:t>
             </a:r>
           </a:p>
         </p:txBody>
@@ -23756,7 +23756,7 @@
                 </a:solidFill>
                 <a:latin typeface="Arial"/>
               </a:rPr>
-              <a:t>Textbook p.205 • Example 13.2 — Sine and the height of a brace</a:t>
+              <a:t>Textbook p.329 • Example 13.2 — Sine and the height of a brace</a:t>
             </a:r>
           </a:p>
         </p:txBody>
@@ -24370,7 +24370,7 @@
                 </a:solidFill>
                 <a:latin typeface="Arial"/>
               </a:rPr>
-              <a:t>Textbook sections 13.1–13.3 pp.202–206; sections 2.10 pp.37–38</a:t>
+              <a:t>Textbook sections 13.1–13.3 pp.326–330; sections 2.10 pp.57–58</a:t>
             </a:r>
           </a:p>
         </p:txBody>
@@ -25083,7 +25083,7 @@
                 </a:solidFill>
                 <a:latin typeface="Arial"/>
               </a:rPr>
-              <a:t>Textbook sections 12.5–12.6 pp.194–196</a:t>
+              <a:t>Textbook sections 12.5–12.6 pp.304–306</a:t>
             </a:r>
           </a:p>
         </p:txBody>
@@ -25283,7 +25283,7 @@
                 </a:solidFill>
                 <a:latin typeface="Arial"/>
               </a:rPr>
-              <a:t>Textbook sections 12.5–12.6 pp.194–196</a:t>
+              <a:t>Textbook sections 12.5–12.6 pp.304–306</a:t>
             </a:r>
           </a:p>
         </p:txBody>
@@ -25331,7 +25331,7 @@
                 </a:solidFill>
                 <a:latin typeface="Arial"/>
               </a:rPr>
-              <a:t>Exercise Book 12A Q17–18 (p.76); 12B Q4–5,7 (pp.77–78)</a:t>
+              <a:t>Exercise Book 12A Q17–18 (p.115); 12B Q4–5,7 (pp.116–117)</a:t>
             </a:r>
           </a:p>
         </p:txBody>
@@ -25993,7 +25993,7 @@
                 </a:solidFill>
                 <a:latin typeface="Arial"/>
               </a:rPr>
-              <a:t>Textbook sections 13.1–13.3 pp.202–206; sections 2.10 pp.37–38</a:t>
+              <a:t>Textbook sections 13.1–13.3 pp.326–330; sections 2.10 pp.57–58</a:t>
             </a:r>
           </a:p>
         </p:txBody>
@@ -26193,7 +26193,7 @@
                 </a:solidFill>
                 <a:latin typeface="Arial"/>
               </a:rPr>
-              <a:t>Resources: Exercise Book 13A Q1–8 (pp.81–82); 13C Q1–2 (p.85)</a:t>
+              <a:t>Resources: Exercise Book 13A Q1–8 (pp.127–128); 13C Q1–2 (p.131)</a:t>
             </a:r>
           </a:p>
         </p:txBody>
@@ -26807,7 +26807,7 @@
                 </a:solidFill>
                 <a:latin typeface="Arial"/>
               </a:rPr>
-              <a:t>Textbook sections 13.1–13.3 pp.202–206; sections 2.10 pp.37–38</a:t>
+              <a:t>Textbook sections 13.1–13.3 pp.326–330; sections 2.10 pp.57–58</a:t>
             </a:r>
           </a:p>
         </p:txBody>
@@ -27538,7 +27538,7 @@
                 </a:solidFill>
                 <a:latin typeface="Arial"/>
               </a:rPr>
-              <a:t>Textbook sections 13.1–13.3 pp.202–206; sections 2.10 pp.37–38</a:t>
+              <a:t>Textbook sections 13.1–13.3 pp.326–330; sections 2.10 pp.57–58</a:t>
             </a:r>
           </a:p>
         </p:txBody>
@@ -28272,7 +28272,7 @@
                 </a:solidFill>
                 <a:latin typeface="Arial"/>
               </a:rPr>
-              <a:t>Textbook sections 13.1–13.3 pp.202–206; sections 2.10 pp.37–38</a:t>
+              <a:t>Textbook sections 13.1–13.3 pp.326–330; sections 2.10 pp.57–58</a:t>
             </a:r>
           </a:p>
         </p:txBody>
@@ -28320,7 +28320,7 @@
                 </a:solidFill>
                 <a:latin typeface="Arial"/>
               </a:rPr>
-              <a:t>Complete Exercise Book 13A Q6–8 and 13C Q1–2 as ready. Use one Easy Numeracy Hub task and compare with the drawn triangle.</a:t>
+              <a:t>Complete Exercise Book 13A Q6–8 and 13C Q1–2 as ready. Use one Level 1 Numeracy Hub task and compare with the drawn triangle.</a:t>
             </a:r>
           </a:p>
         </p:txBody>
@@ -28472,7 +28472,7 @@
                 </a:solidFill>
                 <a:latin typeface="Arial"/>
               </a:rPr>
-              <a:t>Resources: Exercise Book 13A Q1–8 (pp.81–82); 13C Q1–2 (p.85)</a:t>
+              <a:t>Resources: Exercise Book 13A Q1–8 (pp.127–128); 13C Q1–2 (p.131)</a:t>
             </a:r>
           </a:p>
         </p:txBody>
@@ -29086,7 +29086,7 @@
                 </a:solidFill>
                 <a:latin typeface="Arial"/>
               </a:rPr>
-              <a:t>Textbook sections 13.1–13.3 pp.202–206; sections 2.10 pp.37–38</a:t>
+              <a:t>Textbook sections 13.1–13.3 pp.326–330; sections 2.10 pp.57–58</a:t>
             </a:r>
           </a:p>
         </p:txBody>
@@ -29862,7 +29862,7 @@
                 </a:solidFill>
                 <a:latin typeface="Arial"/>
               </a:rPr>
-              <a:t>Textbook sections 13.1–13.3 pp.202–206; sections 2.10 pp.37–38</a:t>
+              <a:t>Textbook sections 13.1–13.3 pp.326–330; sections 2.10 pp.57–58</a:t>
             </a:r>
           </a:p>
         </p:txBody>
@@ -30207,7 +30207,7 @@
                 </a:solidFill>
                 <a:latin typeface="Arial"/>
               </a:rPr>
-              <a:t>Try the scheduled Easy Right-triangle trigonometry task in Numeracy Hub and compare diagrams.</a:t>
+              <a:t>Try the scheduled Level 1 Right-triangle trigonometry task in Numeracy Hub and compare diagrams.</a:t>
             </a:r>
           </a:p>
         </p:txBody>
@@ -30821,7 +30821,7 @@
                 </a:solidFill>
                 <a:latin typeface="Arial"/>
               </a:rPr>
-              <a:t>Textbook sections 13.1–13.3 pp.202–206; sections 2.10 pp.37–38</a:t>
+              <a:t>Textbook sections 13.1–13.3 pp.326–330; sections 2.10 pp.57–58</a:t>
             </a:r>
           </a:p>
         </p:txBody>
@@ -31532,7 +31532,7 @@
                 </a:solidFill>
                 <a:latin typeface="Arial"/>
               </a:rPr>
-              <a:t>Textbook sections 13.1–13.3 pp.202–206; sections 2.10 pp.37–38</a:t>
+              <a:t>Textbook sections 13.1–13.3 pp.326–330; sections 2.10 pp.57–58</a:t>
             </a:r>
           </a:p>
         </p:txBody>
@@ -32218,7 +32218,7 @@
                 </a:solidFill>
                 <a:latin typeface="Arial"/>
               </a:rPr>
-              <a:t>Textbook sections 13.1–13.3 pp.202–206; sections 2.10 pp.37–38</a:t>
+              <a:t>Textbook sections 13.1–13.3 pp.326–330; sections 2.10 pp.57–58</a:t>
             </a:r>
           </a:p>
         </p:txBody>
@@ -32418,7 +32418,7 @@
                 </a:solidFill>
                 <a:latin typeface="Arial"/>
               </a:rPr>
-              <a:t>Resources: Exercise Book 13A Q1–8 (pp.81–82); 13C Q1–2 (p.85)</a:t>
+              <a:t>Resources: Exercise Book 13A Q1–8 (pp.127–128); 13C Q1–2 (p.131)</a:t>
             </a:r>
           </a:p>
         </p:txBody>
@@ -33032,7 +33032,7 @@
                 </a:solidFill>
                 <a:latin typeface="Arial"/>
               </a:rPr>
-              <a:t>Textbook sections 13.1–13.3 pp.202–206; sections 2.10 pp.37–38</a:t>
+              <a:t>Textbook sections 13.1–13.3 pp.326–330; sections 2.10 pp.57–58</a:t>
             </a:r>
           </a:p>
         </p:txBody>
@@ -33743,7 +33743,7 @@
                 </a:solidFill>
                 <a:latin typeface="Arial"/>
               </a:rPr>
-              <a:t>Textbook sections 12.5–12.6 pp.194–196</a:t>
+              <a:t>Textbook sections 12.5–12.6 pp.304–306</a:t>
             </a:r>
           </a:p>
         </p:txBody>
@@ -33943,7 +33943,7 @@
                 </a:solidFill>
                 <a:latin typeface="Arial"/>
               </a:rPr>
-              <a:t>Resources: Exercise Book 12A Q17–18 (p.76); 12B Q4–5,7 (pp.77–78)</a:t>
+              <a:t>Resources: Exercise Book 12A Q17–18 (p.115); 12B Q4–5,7 (pp.116–117)</a:t>
             </a:r>
           </a:p>
         </p:txBody>
@@ -34557,7 +34557,7 @@
                 </a:solidFill>
                 <a:latin typeface="Arial"/>
               </a:rPr>
-              <a:t>Textbook sections 13.1–13.3 pp.202–206; sections 2.10 pp.37–38</a:t>
+              <a:t>Textbook sections 13.1–13.3 pp.326–330; sections 2.10 pp.57–58</a:t>
             </a:r>
           </a:p>
         </p:txBody>
@@ -35268,7 +35268,7 @@
                 </a:solidFill>
                 <a:latin typeface="Arial"/>
               </a:rPr>
-              <a:t>Textbook sections 13.1–13.3 pp.202–206; sections 2.10 pp.37–38</a:t>
+              <a:t>Textbook sections 13.1–13.3 pp.326–330; sections 2.10 pp.57–58</a:t>
             </a:r>
           </a:p>
         </p:txBody>
@@ -35468,7 +35468,7 @@
                 </a:solidFill>
                 <a:latin typeface="Arial"/>
               </a:rPr>
-              <a:t>Resources: Exercise Book 13A Q1–8 (pp.81–82); 13C Q1–2 (p.85)</a:t>
+              <a:t>Resources: Exercise Book 13A Q1–8 (pp.127–128); 13C Q1–2 (p.131)</a:t>
             </a:r>
           </a:p>
         </p:txBody>
@@ -36217,7 +36217,7 @@
                 </a:solidFill>
                 <a:latin typeface="Arial"/>
               </a:rPr>
-              <a:t>Textbook sections 12.5–12.6 pp.194–196</a:t>
+              <a:t>Textbook sections 12.5–12.6 pp.304–306</a:t>
             </a:r>
           </a:p>
         </p:txBody>
@@ -37462,7 +37462,7 @@
                 </a:solidFill>
                 <a:latin typeface="Arial"/>
               </a:rPr>
-              <a:t>Textbook sections 12.5–12.6 pp.194–196</a:t>
+              <a:t>Textbook sections 12.5–12.6 pp.304–306</a:t>
             </a:r>
           </a:p>
         </p:txBody>
@@ -38804,7 +38804,7 @@
                 <a:ea typeface="Arial" pitchFamily="34" charset="-122"/>
                 <a:cs typeface="Arial" pitchFamily="34" charset="-120"/>
               </a:rPr>
-              <a:t>Exercise Book 12B Q4–5 pp.77–78 • Shape Canvas rectangle/diagonal and right triangle • Classroom layout activity</a:t>
+              <a:t>Exercise Book 12B Q4–5 pp.116–117 • Shape Canvas rectangle/diagonal and right triangle • Classroom layout activity</a:t>
             </a:r>
             <a:endParaRPr lang="en-US" sz="1050" dirty="0"/>
           </a:p>
@@ -39400,7 +39400,7 @@
                 </a:solidFill>
                 <a:latin typeface="Arial"/>
               </a:rPr>
-              <a:t>Textbook  |  page 195</a:t>
+              <a:t>Textbook  |  page 305</a:t>
             </a:r>
           </a:p>
         </p:txBody>
@@ -39448,7 +39448,7 @@
                 </a:solidFill>
                 <a:latin typeface="Arial"/>
               </a:rPr>
-              <a:t>Textbook sections 12.5–12.6 pp.194–196</a:t>
+              <a:t>Textbook sections 12.5–12.6 pp.304–306</a:t>
             </a:r>
           </a:p>
         </p:txBody>
@@ -39520,7 +39520,7 @@
                 </a:solidFill>
                 <a:latin typeface="Arial"/>
               </a:rPr>
-              <a:t>Textbook p.195 • Example 12.7 — Compare a measured diagonal with the square target</a:t>
+              <a:t>Textbook p.305 • Example 12.7 — Compare a measured diagonal with the square target</a:t>
             </a:r>
           </a:p>
         </p:txBody>
@@ -40086,7 +40086,7 @@
                 </a:solidFill>
                 <a:latin typeface="Arial"/>
               </a:rPr>
-              <a:t>Textbook  |  page 195</a:t>
+              <a:t>Textbook  |  page 305</a:t>
             </a:r>
           </a:p>
         </p:txBody>
@@ -40134,7 +40134,7 @@
                 </a:solidFill>
                 <a:latin typeface="Arial"/>
               </a:rPr>
-              <a:t>Textbook sections 12.5–12.6 pp.194–196</a:t>
+              <a:t>Textbook sections 12.5–12.6 pp.304–306</a:t>
             </a:r>
           </a:p>
         </p:txBody>
@@ -40206,7 +40206,7 @@
                 </a:solidFill>
                 <a:latin typeface="Arial"/>
               </a:rPr>
-              <a:t>Textbook p.195 • Table 12.1 — Scaled 3–4–5 checks</a:t>
+              <a:t>Textbook p.305 • Table 12.1 — Scaled 3–4–5 checks</a:t>
             </a:r>
           </a:p>
         </p:txBody>

--- a/carpentry/intake-142/PowerPoint/Day-21_2026-12-03_Week-6.pptx
+++ b/carpentry/intake-142/PowerPoint/Day-21_2026-12-03_Week-6.pptx
@@ -16895,6 +16895,104 @@
           </a:p>
         </p:txBody>
       </p:sp>
+      <p:sp>
+        <p:nvSpPr>
+          <p:cNvPr id="22" name="Play quiz W06-L07"/>
+          <p:cNvSpPr txBox="1"/>
+          <p:nvPr/>
+        </p:nvSpPr>
+        <p:spPr>
+          <a:xfrm>
+            <a:off x="6355080" y="6606540"/>
+            <a:ext cx="822960" cy="210312"/>
+          </a:xfrm>
+          <a:prstGeom prst="rect">
+            <a:avLst/>
+          </a:prstGeom>
+          <a:noFill/>
+        </p:spPr>
+        <p:txBody>
+          <a:bodyPr wrap="square" lIns="0" rIns="0" tIns="0" bIns="0" anchor="t">
+            <a:normAutofit fontScale="100000" lnSpcReduction="0"/>
+          </a:bodyPr>
+          <a:lstStyle/>
+          <a:p>
+            <a:pPr>
+              <a:spcBef>
+                <a:spcPts val="0"/>
+              </a:spcBef>
+              <a:spcAft>
+                <a:spcPts val="0"/>
+              </a:spcAft>
+              <a:defRPr sz="1000" b="0">
+                <a:solidFill>
+                  <a:srgbClr val="D0002B"/>
+                </a:solidFill>
+                <a:latin typeface="Arial"/>
+              </a:defRPr>
+            </a:pPr>
+            <a:r>
+              <a:rPr sz="1000">
+                <a:solidFill>
+                  <a:srgbClr val="F7F8FC"/>
+                </a:solidFill>
+                <a:latin typeface="Arial"/>
+                <a:hlinkClick r:id="rId8"/>
+              </a:rPr>
+              <a:t>Play quiz</a:t>
+            </a:r>
+          </a:p>
+        </p:txBody>
+      </p:sp>
+      <p:sp>
+        <p:nvSpPr>
+          <p:cNvPr id="23" name="Quiz PDF W06-L07"/>
+          <p:cNvSpPr txBox="1"/>
+          <p:nvPr/>
+        </p:nvSpPr>
+        <p:spPr>
+          <a:xfrm>
+            <a:off x="7296912" y="6606540"/>
+            <a:ext cx="1005840" cy="210312"/>
+          </a:xfrm>
+          <a:prstGeom prst="rect">
+            <a:avLst/>
+          </a:prstGeom>
+          <a:noFill/>
+        </p:spPr>
+        <p:txBody>
+          <a:bodyPr wrap="square" lIns="0" rIns="0" tIns="0" bIns="0" anchor="t">
+            <a:normAutofit fontScale="100000" lnSpcReduction="0"/>
+          </a:bodyPr>
+          <a:lstStyle/>
+          <a:p>
+            <a:pPr>
+              <a:spcBef>
+                <a:spcPts val="0"/>
+              </a:spcBef>
+              <a:spcAft>
+                <a:spcPts val="0"/>
+              </a:spcAft>
+              <a:defRPr sz="1000" b="0">
+                <a:solidFill>
+                  <a:srgbClr val="D0002B"/>
+                </a:solidFill>
+                <a:latin typeface="Arial"/>
+              </a:defRPr>
+            </a:pPr>
+            <a:r>
+              <a:rPr sz="1000">
+                <a:solidFill>
+                  <a:srgbClr val="F7F8FC"/>
+                </a:solidFill>
+                <a:latin typeface="Arial"/>
+                <a:hlinkClick r:id="rId9"/>
+              </a:rPr>
+              <a:t>Quiz PDF</a:t>
+            </a:r>
+          </a:p>
+        </p:txBody>
+      </p:sp>
     </p:spTree>
   </p:cSld>
   <p:clrMapOvr>
@@ -35737,6 +35835,104 @@
                 <a:latin typeface="Arial"/>
               </a:rPr>
               <a:t>Day 21  •  2026-12-03  •  41</a:t>
+            </a:r>
+          </a:p>
+        </p:txBody>
+      </p:sp>
+      <p:sp>
+        <p:nvSpPr>
+          <p:cNvPr id="22" name="Play quiz W06-L08"/>
+          <p:cNvSpPr txBox="1"/>
+          <p:nvPr/>
+        </p:nvSpPr>
+        <p:spPr>
+          <a:xfrm>
+            <a:off x="6355080" y="6606540"/>
+            <a:ext cx="822960" cy="210312"/>
+          </a:xfrm>
+          <a:prstGeom prst="rect">
+            <a:avLst/>
+          </a:prstGeom>
+          <a:noFill/>
+        </p:spPr>
+        <p:txBody>
+          <a:bodyPr wrap="square" lIns="0" rIns="0" tIns="0" bIns="0" anchor="t">
+            <a:normAutofit fontScale="100000" lnSpcReduction="0"/>
+          </a:bodyPr>
+          <a:lstStyle/>
+          <a:p>
+            <a:pPr>
+              <a:spcBef>
+                <a:spcPts val="0"/>
+              </a:spcBef>
+              <a:spcAft>
+                <a:spcPts val="0"/>
+              </a:spcAft>
+              <a:defRPr sz="1000" b="0">
+                <a:solidFill>
+                  <a:srgbClr val="D0002B"/>
+                </a:solidFill>
+                <a:latin typeface="Arial"/>
+              </a:defRPr>
+            </a:pPr>
+            <a:r>
+              <a:rPr sz="1000">
+                <a:solidFill>
+                  <a:srgbClr val="F7F8FC"/>
+                </a:solidFill>
+                <a:latin typeface="Arial"/>
+                <a:hlinkClick r:id="rId8"/>
+              </a:rPr>
+              <a:t>Play quiz</a:t>
+            </a:r>
+          </a:p>
+        </p:txBody>
+      </p:sp>
+      <p:sp>
+        <p:nvSpPr>
+          <p:cNvPr id="23" name="Quiz PDF W06-L08"/>
+          <p:cNvSpPr txBox="1"/>
+          <p:nvPr/>
+        </p:nvSpPr>
+        <p:spPr>
+          <a:xfrm>
+            <a:off x="7296912" y="6606540"/>
+            <a:ext cx="1005840" cy="210312"/>
+          </a:xfrm>
+          <a:prstGeom prst="rect">
+            <a:avLst/>
+          </a:prstGeom>
+          <a:noFill/>
+        </p:spPr>
+        <p:txBody>
+          <a:bodyPr wrap="square" lIns="0" rIns="0" tIns="0" bIns="0" anchor="t">
+            <a:normAutofit fontScale="100000" lnSpcReduction="0"/>
+          </a:bodyPr>
+          <a:lstStyle/>
+          <a:p>
+            <a:pPr>
+              <a:spcBef>
+                <a:spcPts val="0"/>
+              </a:spcBef>
+              <a:spcAft>
+                <a:spcPts val="0"/>
+              </a:spcAft>
+              <a:defRPr sz="1000" b="0">
+                <a:solidFill>
+                  <a:srgbClr val="D0002B"/>
+                </a:solidFill>
+                <a:latin typeface="Arial"/>
+              </a:defRPr>
+            </a:pPr>
+            <a:r>
+              <a:rPr sz="1000">
+                <a:solidFill>
+                  <a:srgbClr val="F7F8FC"/>
+                </a:solidFill>
+                <a:latin typeface="Arial"/>
+                <a:hlinkClick r:id="rId9"/>
+              </a:rPr>
+              <a:t>Quiz PDF</a:t>
             </a:r>
           </a:p>
         </p:txBody>
